--- a/Slides/CSC6103/VT-02 System Virtualization.pptx
+++ b/Slides/CSC6103/VT-02 System Virtualization.pptx
@@ -266,7 +266,7 @@
             <a:fld id="{45BDCE37-E9BE-4280-8D68-34E43D66CEDB}" type="datetimeFigureOut">
               <a:rPr lang="zh-TW" altLang="en-US" smtClean="0"/>
               <a:pPr/>
-              <a:t>2026/4/24</a:t>
+              <a:t>2026/9/9</a:t>
             </a:fld>
             <a:endParaRPr lang="zh-TW" altLang="en-US"/>
           </a:p>
@@ -433,7 +433,7 @@
             <a:fld id="{FBFBA883-381C-409E-9635-BB54B21745E4}" type="datetimeFigureOut">
               <a:rPr lang="zh-TW" altLang="en-US" smtClean="0"/>
               <a:pPr/>
-              <a:t>2026/4/24</a:t>
+              <a:t>2026/9/9</a:t>
             </a:fld>
             <a:endParaRPr lang="zh-TW" altLang="en-US"/>
           </a:p>
@@ -917,7 +917,7 @@
               </a14:hiddenLine>
             </a:ext>
             <a:ext uri="{FAA26D3D-D897-4be2-8F04-BA451C77F1D7}">
-              <ma14:placeholderFlag xmlns="" xmlns:ma14="http://schemas.microsoft.com/office/mac/drawingml/2011/main" val="1"/>
+              <ma14:placeholderFlag xmlns:ma14="http://schemas.microsoft.com/office/mac/drawingml/2011/main" xmlns="" val="1"/>
             </a:ext>
           </a:extLst>
         </p:spPr>
@@ -3590,9 +3590,9 @@
           <a:solidFill>
             <a:schemeClr val="tx2"/>
           </a:solidFill>
-          <a:latin typeface="Calibri" pitchFamily="34" charset="0"/>
-          <a:ea typeface="標楷體" pitchFamily="65" charset="-120"/>
-          <a:cs typeface="+mj-cs"/>
+          <a:latin typeface="Times New Roman" panose="02020603050405020304" pitchFamily="18" charset="0"/>
+          <a:ea typeface="Times New Roman" panose="02020603050405020304" pitchFamily="18" charset="0"/>
+          <a:cs typeface="Times New Roman" panose="02020603050405020304" pitchFamily="18" charset="0"/>
         </a:defRPr>
       </a:lvl1pPr>
       <a:lvl2pPr algn="l" rtl="0" eaLnBrk="1" fontAlgn="base" hangingPunct="1">
@@ -3742,9 +3742,9 @@
           <a:solidFill>
             <a:schemeClr val="tx1"/>
           </a:solidFill>
-          <a:latin typeface="Calibri" pitchFamily="34" charset="0"/>
-          <a:ea typeface="標楷體" pitchFamily="65" charset="-120"/>
-          <a:cs typeface="+mn-cs"/>
+          <a:latin typeface="Times New Roman" panose="02020603050405020304" pitchFamily="18" charset="0"/>
+          <a:ea typeface="Times New Roman" panose="02020603050405020304" pitchFamily="18" charset="0"/>
+          <a:cs typeface="Times New Roman" panose="02020603050405020304" pitchFamily="18" charset="0"/>
         </a:defRPr>
       </a:lvl1pPr>
       <a:lvl2pPr marL="557199" indent="-214308" algn="l" rtl="0" eaLnBrk="1" fontAlgn="base" hangingPunct="1">
@@ -3764,8 +3764,9 @@
           <a:solidFill>
             <a:schemeClr val="tx1"/>
           </a:solidFill>
-          <a:latin typeface="Calibri" pitchFamily="34" charset="0"/>
-          <a:ea typeface="標楷體" pitchFamily="65" charset="-120"/>
+          <a:latin typeface="Times New Roman" panose="02020603050405020304" pitchFamily="18" charset="0"/>
+          <a:ea typeface="Times New Roman" panose="02020603050405020304" pitchFamily="18" charset="0"/>
+          <a:cs typeface="Times New Roman" panose="02020603050405020304" pitchFamily="18" charset="0"/>
         </a:defRPr>
       </a:lvl2pPr>
       <a:lvl3pPr marL="857229" indent="-171446" algn="l" rtl="0" eaLnBrk="1" fontAlgn="base" hangingPunct="1">
@@ -4269,7 +4270,7 @@
           <a:lstStyle/>
           <a:p>
             <a:r>
-              <a:rPr lang="en-US" sz="2400" dirty="0"/>
+              <a:rPr lang="en-US" sz="2000" dirty="0"/>
               <a:t>Why do we talk about emulation</a:t>
             </a:r>
           </a:p>
@@ -4289,7 +4290,7 @@
           </a:p>
           <a:p>
             <a:r>
-              <a:rPr lang="en-US" sz="2400" dirty="0"/>
+              <a:rPr lang="en-US" sz="2000" dirty="0"/>
               <a:t>Goal of emulation</a:t>
             </a:r>
           </a:p>
@@ -4623,7 +4624,7 @@
         </p:nvSpPr>
         <p:spPr>
           <a:xfrm>
-            <a:off x="914400" y="108349"/>
+            <a:off x="914400" y="82948"/>
             <a:ext cx="7761290" cy="519113"/>
           </a:xfrm>
         </p:spPr>
@@ -4650,8 +4651,8 @@
         </p:nvSpPr>
         <p:spPr>
           <a:xfrm>
-            <a:off x="914400" y="758138"/>
-            <a:ext cx="7290261" cy="3863738"/>
+            <a:off x="990600" y="825685"/>
+            <a:ext cx="7290261" cy="3492129"/>
           </a:xfrm>
         </p:spPr>
         <p:txBody>
@@ -4734,11 +4735,8 @@
                 <a:latin typeface="Times New Roman" panose="02020603050405020304" pitchFamily="18" charset="0"/>
                 <a:cs typeface="Times New Roman" panose="02020603050405020304" pitchFamily="18" charset="0"/>
               </a:rPr>
-              <a:t>Pros</a:t>
-            </a:r>
-          </a:p>
-          <a:p>
-            <a:pPr lvl="2"/>
+              <a:t>Pros : </a:t>
+            </a:r>
             <a:r>
               <a:rPr lang="en-US" sz="1600" dirty="0">
                 <a:latin typeface="Times New Roman" panose="02020603050405020304" pitchFamily="18" charset="0"/>
@@ -4754,11 +4752,8 @@
                 <a:latin typeface="Times New Roman" panose="02020603050405020304" pitchFamily="18" charset="0"/>
                 <a:cs typeface="Times New Roman" panose="02020603050405020304" pitchFamily="18" charset="0"/>
               </a:rPr>
-              <a:t>Cons</a:t>
-            </a:r>
-          </a:p>
-          <a:p>
-            <a:pPr lvl="2"/>
+              <a:t>Cons : </a:t>
+            </a:r>
             <a:r>
               <a:rPr lang="en-US" sz="1600" dirty="0">
                 <a:latin typeface="Times New Roman" panose="02020603050405020304" pitchFamily="18" charset="0"/>
@@ -4846,7 +4841,7 @@
         </p:nvSpPr>
         <p:spPr>
           <a:xfrm>
-            <a:off x="881149" y="108349"/>
+            <a:off x="881149" y="82948"/>
             <a:ext cx="7794541" cy="519113"/>
           </a:xfrm>
         </p:spPr>
@@ -5181,7 +5176,7 @@
         </p:nvSpPr>
         <p:spPr>
           <a:xfrm>
-            <a:off x="881149" y="108349"/>
+            <a:off x="881149" y="91415"/>
             <a:ext cx="7794541" cy="519113"/>
           </a:xfrm>
         </p:spPr>
@@ -5411,7 +5406,7 @@
         </p:nvSpPr>
         <p:spPr>
           <a:xfrm>
-            <a:off x="889462" y="108349"/>
+            <a:off x="889462" y="91415"/>
             <a:ext cx="7786228" cy="519113"/>
           </a:xfrm>
         </p:spPr>
@@ -6277,7 +6272,7 @@
         </p:nvSpPr>
         <p:spPr>
           <a:xfrm>
-            <a:off x="1072753" y="138197"/>
+            <a:off x="1072753" y="109322"/>
             <a:ext cx="6515100" cy="496490"/>
           </a:xfrm>
         </p:spPr>
@@ -6675,7 +6670,7 @@
         </p:nvSpPr>
         <p:spPr>
           <a:xfrm>
-            <a:off x="839585" y="108349"/>
+            <a:off x="916587" y="98724"/>
             <a:ext cx="7836105" cy="519113"/>
           </a:xfrm>
         </p:spPr>
@@ -6858,7 +6853,7 @@
         </p:nvSpPr>
         <p:spPr>
           <a:xfrm>
-            <a:off x="964276" y="108349"/>
+            <a:off x="964276" y="79474"/>
             <a:ext cx="7711414" cy="519113"/>
           </a:xfrm>
         </p:spPr>
@@ -8530,7 +8525,7 @@
         </p:nvSpPr>
         <p:spPr>
           <a:xfrm>
-            <a:off x="955964" y="108349"/>
+            <a:off x="955964" y="79474"/>
             <a:ext cx="7719726" cy="519113"/>
           </a:xfrm>
         </p:spPr>
@@ -8705,8 +8700,8 @@
         </p:nvSpPr>
         <p:spPr>
           <a:xfrm>
-            <a:off x="856211" y="108349"/>
-            <a:ext cx="7819479" cy="519113"/>
+            <a:off x="924026" y="79474"/>
+            <a:ext cx="7780540" cy="519113"/>
           </a:xfrm>
         </p:spPr>
         <p:txBody>
@@ -8852,7 +8847,7 @@
         </p:nvSpPr>
         <p:spPr>
           <a:xfrm>
-            <a:off x="856211" y="108349"/>
+            <a:off x="856211" y="79474"/>
             <a:ext cx="7819479" cy="519113"/>
           </a:xfrm>
         </p:spPr>
@@ -8992,7 +8987,7 @@
         </p:nvSpPr>
         <p:spPr>
           <a:xfrm>
-            <a:off x="881149" y="108349"/>
+            <a:off x="881149" y="79474"/>
             <a:ext cx="7794541" cy="519113"/>
           </a:xfrm>
         </p:spPr>
@@ -9042,7 +9037,10 @@
           <a:p>
             <a:pPr lvl="2"/>
             <a:r>
-              <a:rPr lang="en-US" sz="1800" dirty="0"/>
+              <a:rPr lang="en-US" sz="1800" dirty="0">
+                <a:latin typeface="Times New Roman" panose="02020603050405020304" pitchFamily="18" charset="0"/>
+                <a:cs typeface="Times New Roman" panose="02020603050405020304" pitchFamily="18" charset="0"/>
+              </a:rPr>
               <a:t>Highly frequent context switches between code caches and emulation manager will degrade performance.</a:t>
             </a:r>
           </a:p>
@@ -9056,7 +9054,10 @@
           <a:p>
             <a:pPr lvl="2"/>
             <a:r>
-              <a:rPr lang="en-US" sz="1800" dirty="0"/>
+              <a:rPr lang="en-US" sz="1800" dirty="0">
+                <a:latin typeface="Times New Roman" panose="02020603050405020304" pitchFamily="18" charset="0"/>
+                <a:cs typeface="Times New Roman" panose="02020603050405020304" pitchFamily="18" charset="0"/>
+              </a:rPr>
               <a:t>Translate guest code block in instruction-wise (translate one instruction at a time) will miss many optimization opportunities.</a:t>
             </a:r>
           </a:p>
@@ -9159,7 +9160,7 @@
         </p:nvSpPr>
         <p:spPr>
           <a:xfrm>
-            <a:off x="939338" y="108349"/>
+            <a:off x="939338" y="79474"/>
             <a:ext cx="7736352" cy="519113"/>
           </a:xfrm>
         </p:spPr>
@@ -9581,7 +9582,12 @@
             <p:ph type="title"/>
           </p:nvPr>
         </p:nvSpPr>
-        <p:spPr/>
+        <p:spPr>
+          <a:xfrm>
+            <a:off x="837398" y="79474"/>
+            <a:ext cx="7838292" cy="519113"/>
+          </a:xfrm>
+        </p:spPr>
         <p:txBody>
           <a:bodyPr/>
           <a:lstStyle/>
@@ -9733,8 +9739,8 @@
         </p:nvSpPr>
         <p:spPr>
           <a:xfrm>
-            <a:off x="897775" y="108349"/>
-            <a:ext cx="7777915" cy="519113"/>
+            <a:off x="972588" y="79474"/>
+            <a:ext cx="7703102" cy="519113"/>
           </a:xfrm>
         </p:spPr>
         <p:txBody>
@@ -9984,8 +9990,8 @@
         </p:nvSpPr>
         <p:spPr>
           <a:xfrm>
-            <a:off x="897775" y="108349"/>
-            <a:ext cx="7777915" cy="519113"/>
+            <a:off x="972152" y="79474"/>
+            <a:ext cx="7703538" cy="519113"/>
           </a:xfrm>
         </p:spPr>
         <p:txBody>
@@ -10148,7 +10154,7 @@
         </p:nvSpPr>
         <p:spPr>
           <a:xfrm>
-            <a:off x="914400" y="108349"/>
+            <a:off x="914400" y="79474"/>
             <a:ext cx="7761290" cy="519113"/>
           </a:xfrm>
         </p:spPr>
@@ -10310,7 +10316,7 @@
         </p:nvSpPr>
         <p:spPr>
           <a:xfrm>
-            <a:off x="914400" y="108349"/>
+            <a:off x="914400" y="79474"/>
             <a:ext cx="7761290" cy="519113"/>
           </a:xfrm>
         </p:spPr>
@@ -10501,7 +10507,7 @@
         </p:nvSpPr>
         <p:spPr>
           <a:xfrm>
-            <a:off x="906087" y="108349"/>
+            <a:off x="906087" y="79474"/>
             <a:ext cx="7769603" cy="519113"/>
           </a:xfrm>
         </p:spPr>
@@ -10879,7 +10885,7 @@
         </p:nvSpPr>
         <p:spPr>
           <a:xfrm>
-            <a:off x="977933" y="63201"/>
+            <a:off x="977933" y="34326"/>
             <a:ext cx="6172200" cy="651272"/>
           </a:xfrm>
         </p:spPr>
@@ -11886,7 +11892,7 @@
         </p:nvSpPr>
         <p:spPr>
           <a:xfrm>
-            <a:off x="906087" y="108349"/>
+            <a:off x="906087" y="79474"/>
             <a:ext cx="7769603" cy="519113"/>
           </a:xfrm>
         </p:spPr>
@@ -12140,7 +12146,7 @@
         </p:nvSpPr>
         <p:spPr>
           <a:xfrm>
-            <a:off x="922713" y="108349"/>
+            <a:off x="922713" y="79474"/>
             <a:ext cx="7752977" cy="519113"/>
           </a:xfrm>
         </p:spPr>
@@ -12584,8 +12590,8 @@
         </p:nvSpPr>
         <p:spPr>
           <a:xfrm>
-            <a:off x="864524" y="108349"/>
-            <a:ext cx="7811166" cy="519113"/>
+            <a:off x="946610" y="79474"/>
+            <a:ext cx="7729079" cy="519113"/>
           </a:xfrm>
         </p:spPr>
         <p:txBody>
@@ -12849,7 +12855,7 @@
         </p:nvSpPr>
         <p:spPr>
           <a:xfrm>
-            <a:off x="949670" y="112675"/>
+            <a:off x="949670" y="66955"/>
             <a:ext cx="6382941" cy="609600"/>
           </a:xfrm>
         </p:spPr>
@@ -12859,11 +12865,8 @@
           <a:p>
             <a:pPr eaLnBrk="1" hangingPunct="1"/>
             <a:r>
-              <a:rPr lang="en-US" altLang="zh-TW" dirty="0">
-                <a:latin typeface="Calibri"/>
-                <a:cs typeface="Calibri"/>
-              </a:rPr>
-              <a:t>Virtualization is an isomorphism</a:t>
+              <a:rPr lang="en-US" altLang="zh-TW" dirty="0"/>
+              <a:t>Virtualization Isomorphism</a:t>
             </a:r>
           </a:p>
         </p:txBody>
@@ -14750,7 +14753,7 @@
         </p:nvSpPr>
         <p:spPr>
           <a:xfrm>
-            <a:off x="972589" y="108349"/>
+            <a:off x="972589" y="79474"/>
             <a:ext cx="7703101" cy="519113"/>
           </a:xfrm>
         </p:spPr>
@@ -15130,8 +15133,8 @@
         </p:nvSpPr>
         <p:spPr>
           <a:xfrm>
-            <a:off x="864524" y="108349"/>
-            <a:ext cx="7811166" cy="519113"/>
+            <a:off x="924025" y="79474"/>
+            <a:ext cx="7751664" cy="519113"/>
           </a:xfrm>
         </p:spPr>
         <p:txBody>
@@ -15158,8 +15161,8 @@
         </p:nvSpPr>
         <p:spPr>
           <a:xfrm>
-            <a:off x="789709" y="844153"/>
-            <a:ext cx="7672648" cy="3671888"/>
+            <a:off x="924025" y="844153"/>
+            <a:ext cx="7538332" cy="3671888"/>
           </a:xfrm>
         </p:spPr>
         <p:txBody>
@@ -24981,18 +24984,18 @@
           <a:lstStyle/>
           <a:p>
             <a:r>
-              <a:rPr lang="en-US" altLang="zh-TW" dirty="0">
+              <a:rPr lang="en-US" altLang="zh-TW" sz="3200" dirty="0">
                 <a:cs typeface="Calibri"/>
               </a:rPr>
               <a:t>OS VMs Key Issue – ISA </a:t>
             </a:r>
             <a:r>
-              <a:rPr lang="en-US" altLang="zh-TW" dirty="0" err="1">
+              <a:rPr lang="en-US" altLang="zh-TW" sz="3200" dirty="0" err="1">
                 <a:cs typeface="Calibri"/>
               </a:rPr>
               <a:t>Virtualizability</a:t>
             </a:r>
-            <a:endParaRPr lang="zh-TW" altLang="en-US" dirty="0"/>
+            <a:endParaRPr lang="zh-TW" altLang="en-US" sz="3200" dirty="0"/>
           </a:p>
         </p:txBody>
       </p:sp>

--- a/Slides/CSC6103/VT-02 System Virtualization.pptx
+++ b/Slides/CSC6103/VT-02 System Virtualization.pptx
@@ -917,7 +917,7 @@
               </a14:hiddenLine>
             </a:ext>
             <a:ext uri="{FAA26D3D-D897-4be2-8F04-BA451C77F1D7}">
-              <ma14:placeholderFlag xmlns:ma14="http://schemas.microsoft.com/office/mac/drawingml/2011/main" xmlns="" val="1"/>
+              <ma14:placeholderFlag xmlns="" xmlns:ma14="http://schemas.microsoft.com/office/mac/drawingml/2011/main" val="1"/>
             </a:ext>
           </a:extLst>
         </p:spPr>

--- a/Slides/CSC6103/VT-02 System Virtualization.pptx
+++ b/Slides/CSC6103/VT-02 System Virtualization.pptx
@@ -917,7 +917,7 @@
               </a14:hiddenLine>
             </a:ext>
             <a:ext uri="{FAA26D3D-D897-4be2-8F04-BA451C77F1D7}">
-              <ma14:placeholderFlag xmlns="" xmlns:ma14="http://schemas.microsoft.com/office/mac/drawingml/2011/main" val="1"/>
+              <ma14:placeholderFlag xmlns:ma14="http://schemas.microsoft.com/office/mac/drawingml/2011/main" xmlns="" val="1"/>
             </a:ext>
           </a:extLst>
         </p:spPr>
